--- a/system-design-101/vi/lessons/sd-04-027/slides/sd-04-027.pptx
+++ b/system-design-101/vi/lessons/sd-04-027/slides/sd-04-027.pptx
@@ -2002,17 +2002,6 @@
               <a:t> riêng,</a:t>
             </a:r>
             <a:r>
-              <a:rPr lang="en-US" sz="3000" dirty="0" spc="-4" kern="0">
-                <a:solidFill>
-                  <a:srgbClr val="E4E1D8"/>
-                </a:solidFill>
-                <a:latin typeface="Be Vietnam Pro" pitchFamily="34" charset="0"/>
-                <a:ea typeface="Be Vietnam Pro" pitchFamily="34" charset="-122"/>
-                <a:cs typeface="Be Vietnam Pro" pitchFamily="34" charset="-120"/>
-              </a:rPr>
-              <a:t> bạn</a:t>
-            </a:r>
-            <a:r>
               <a:rPr lang="en-US" sz="3000" dirty="0" spc="0" kern="0">
                 <a:solidFill>
                   <a:srgbClr val="E4E1D8"/>
@@ -3192,62 +3181,7 @@
                 <a:ea typeface="Be Vietnam Pro" pitchFamily="34" charset="-122"/>
                 <a:cs typeface="Be Vietnam Pro" pitchFamily="34" charset="-120"/>
               </a:rPr>
-              <a:t> trúc:</a:t>
-            </a:r>
-            <a:r>
-              <a:rPr lang="en-US" sz="2250" dirty="0" spc="1" kern="0">
-                <a:solidFill>
-                  <a:srgbClr val="F3EEE3"/>
-                </a:solidFill>
-                <a:latin typeface="Be Vietnam Pro" pitchFamily="34" charset="0"/>
-                <a:ea typeface="Be Vietnam Pro" pitchFamily="34" charset="-122"/>
-                <a:cs typeface="Be Vietnam Pro" pitchFamily="34" charset="-120"/>
-              </a:rPr>
-              <a:t> hỏi</a:t>
-            </a:r>
-            <a:r>
-              <a:rPr lang="en-US" sz="2250" dirty="0" spc="-16" kern="0">
-                <a:solidFill>
-                  <a:srgbClr val="F3EEE3"/>
-                </a:solidFill>
-                <a:latin typeface="Be Vietnam Pro" pitchFamily="34" charset="0"/>
-                <a:ea typeface="Be Vietnam Pro" pitchFamily="34" charset="-122"/>
-                <a:cs typeface="Be Vietnam Pro" pitchFamily="34" charset="-120"/>
-              </a:rPr>
-              <a:t> và</a:t>
-            </a:r>
-            <a:r>
-              <a:rPr lang="en-US" sz="2250" dirty="0" spc="-2" kern="0">
-                <a:solidFill>
-                  <a:srgbClr val="F3EEE3"/>
-                </a:solidFill>
-                <a:latin typeface="Be Vietnam Pro" pitchFamily="34" charset="0"/>
-                <a:ea typeface="Be Vietnam Pro" pitchFamily="34" charset="-122"/>
-                <a:cs typeface="Be Vietnam Pro" pitchFamily="34" charset="-120"/>
-              </a:rPr>
-              <a:t> ghi</a:t>
-            </a:r>
-            <a:r>
-              <a:rPr lang="en-US" sz="2250" dirty="0" spc="5" kern="0">
-                <a:solidFill>
-                  <a:srgbClr val="F3EEE3"/>
-                </a:solidFill>
-                <a:latin typeface="Be Vietnam Pro" pitchFamily="34" charset="0"/>
-                <a:ea typeface="Be Vietnam Pro" pitchFamily="34" charset="-122"/>
-                <a:cs typeface="Be Vietnam Pro" pitchFamily="34" charset="-120"/>
-              </a:rPr>
-              <a:t> dữ</a:t>
-            </a:r>
-            <a:r>
-              <a:rPr lang="en-US" sz="2250" dirty="0" spc="-2" kern="0">
-                <a:solidFill>
-                  <a:srgbClr val="F3EEE3"/>
-                </a:solidFill>
-                <a:latin typeface="Be Vietnam Pro" pitchFamily="34" charset="0"/>
-                <a:ea typeface="Be Vietnam Pro" pitchFamily="34" charset="-122"/>
-                <a:cs typeface="Be Vietnam Pro" pitchFamily="34" charset="-120"/>
-              </a:rPr>
-              <a:t> liệu</a:t>
+              <a:t> trúc</a:t>
             </a:r>
             <a:endParaRPr lang="en-US" sz="2250" dirty="0"/>
           </a:p>
@@ -4779,7 +4713,7 @@
               <a:t> dấu</a:t>
             </a:r>
             <a:r>
-              <a:rPr lang="en-US" sz="7800" dirty="0" spc="-61" kern="0">
+              <a:rPr lang="en-US" sz="7800" dirty="0" spc="-39" kern="0">
                 <a:solidFill>
                   <a:srgbClr val="14161C"/>
                 </a:solidFill>
@@ -4787,40 +4721,7 @@
                 <a:ea typeface="Bricolage Grotesque ExtraBold" pitchFamily="34" charset="-122"/>
                 <a:cs typeface="Bricolage Grotesque ExtraBold" pitchFamily="34" charset="-120"/>
               </a:rPr>
-              <a:t> vết</a:t>
-            </a:r>
-            <a:r>
-              <a:rPr lang="en-US" sz="7800" dirty="0" spc="-4" kern="0">
-                <a:solidFill>
-                  <a:srgbClr val="14161C"/>
-                </a:solidFill>
-                <a:latin typeface="Bricolage Grotesque ExtraBold" pitchFamily="34" charset="0"/>
-                <a:ea typeface="Bricolage Grotesque ExtraBold" pitchFamily="34" charset="-122"/>
-                <a:cs typeface="Bricolage Grotesque ExtraBold" pitchFamily="34" charset="-120"/>
-              </a:rPr>
-              <a:t> nó</a:t>
-            </a:r>
-            <a:r>
-              <a:rPr lang="en-US" sz="7800" dirty="0" spc="22" kern="0">
-                <a:solidFill>
-                  <a:srgbClr val="14161C"/>
-                </a:solidFill>
-                <a:latin typeface="Bricolage Grotesque ExtraBold" pitchFamily="34" charset="0"/>
-                <a:ea typeface="Bricolage Grotesque ExtraBold" pitchFamily="34" charset="-122"/>
-                <a:cs typeface="Bricolage Grotesque ExtraBold" pitchFamily="34" charset="-120"/>
-              </a:rPr>
-              <a:t> để</a:t>
-            </a:r>
-            <a:r>
-              <a:rPr lang="en-US" sz="7800" dirty="0" spc="-6" kern="0">
-                <a:solidFill>
-                  <a:srgbClr val="14161C"/>
-                </a:solidFill>
-                <a:latin typeface="Bricolage Grotesque ExtraBold" pitchFamily="34" charset="0"/>
-                <a:ea typeface="Bricolage Grotesque ExtraBold" pitchFamily="34" charset="-122"/>
-                <a:cs typeface="Bricolage Grotesque ExtraBold" pitchFamily="34" charset="-120"/>
-              </a:rPr>
-              <a:t> lại.</a:t>
+              <a:t> vết.</a:t>
             </a:r>
             <a:endParaRPr lang="en-US" sz="7800" dirty="0"/>
           </a:p>
@@ -4953,18 +4854,7 @@
               <a:t> gọi</a:t>
             </a:r>
             <a:r>
-              <a:rPr lang="en-US" sz="2700" dirty="0" spc="-16" kern="0">
-                <a:solidFill>
-                  <a:srgbClr val="14161C"/>
-                </a:solidFill>
-                <a:latin typeface="Be Vietnam Pro" pitchFamily="34" charset="0"/>
-                <a:ea typeface="Be Vietnam Pro" pitchFamily="34" charset="-122"/>
-                <a:cs typeface="Be Vietnam Pro" pitchFamily="34" charset="-120"/>
-              </a:rPr>
-              <a:t> tên</a:t>
-            </a:r>
-            <a:r>
-              <a:rPr lang="en-US" sz="2700" dirty="0" spc="0" kern="0">
+              <a:rPr lang="en-US" sz="2700" dirty="0" spc="-1" kern="0">
                 <a:solidFill>
                   <a:srgbClr val="14161C"/>
                 </a:solidFill>
@@ -8753,10 +8643,10 @@
                 <a:ea typeface="Be Vietnam Pro" pitchFamily="34" charset="-122"/>
                 <a:cs typeface="Be Vietnam Pro" pitchFamily="34" charset="-120"/>
               </a:rPr>
-              <a:t> sao</a:t>
-            </a:r>
-            <a:r>
-              <a:rPr lang="en-US" sz="2250" dirty="0" spc="-8" kern="0">
+              <a:t> sao tách:</a:t>
+            </a:r>
+            <a:r>
+              <a:rPr lang="en-US" sz="2250" dirty="0" spc="0" kern="0">
                 <a:solidFill>
                   <a:srgbClr val="9AA0B5"/>
                 </a:solidFill>
@@ -8764,7 +8654,18 @@
                 <a:ea typeface="Be Vietnam Pro" pitchFamily="34" charset="-122"/>
                 <a:cs typeface="Be Vietnam Pro" pitchFamily="34" charset="-120"/>
               </a:rPr>
-              <a:t> tách</a:t>
+              <a:t> BEGIN,</a:t>
+            </a:r>
+            <a:r>
+              <a:rPr lang="en-US" sz="2250" dirty="0" spc="-13" kern="0">
+                <a:solidFill>
+                  <a:srgbClr val="9AA0B5"/>
+                </a:solidFill>
+                <a:latin typeface="Be Vietnam Pro" pitchFamily="34" charset="0"/>
+                <a:ea typeface="Be Vietnam Pro" pitchFamily="34" charset="-122"/>
+                <a:cs typeface="Be Vietnam Pro" pitchFamily="34" charset="-120"/>
+              </a:rPr>
+              <a:t> ROLLBACK</a:t>
             </a:r>
             <a:r>
               <a:rPr lang="en-US" sz="2250" dirty="0" spc="1" kern="0">
@@ -8775,10 +8676,10 @@
                 <a:ea typeface="Be Vietnam Pro" pitchFamily="34" charset="-122"/>
                 <a:cs typeface="Be Vietnam Pro" pitchFamily="34" charset="-120"/>
               </a:rPr>
-              <a:t> chặng:</a:t>
-            </a:r>
-            <a:r>
-              <a:rPr lang="en-US" sz="2250" dirty="0" spc="0" kern="0">
+              <a:t> chỉ</a:t>
+            </a:r>
+            <a:r>
+              <a:rPr lang="en-US" sz="2250" dirty="0" spc="2" kern="0">
                 <a:solidFill>
                   <a:srgbClr val="9AA0B5"/>
                 </a:solidFill>
@@ -8786,73 +8687,7 @@
                 <a:ea typeface="Be Vietnam Pro" pitchFamily="34" charset="-122"/>
                 <a:cs typeface="Be Vietnam Pro" pitchFamily="34" charset="-120"/>
               </a:rPr>
-              <a:t> BEGIN,</a:t>
-            </a:r>
-            <a:r>
-              <a:rPr lang="en-US" sz="2250" dirty="0" spc="-13" kern="0">
-                <a:solidFill>
-                  <a:srgbClr val="9AA0B5"/>
-                </a:solidFill>
-                <a:latin typeface="Be Vietnam Pro" pitchFamily="34" charset="0"/>
-                <a:ea typeface="Be Vietnam Pro" pitchFamily="34" charset="-122"/>
-                <a:cs typeface="Be Vietnam Pro" pitchFamily="34" charset="-120"/>
-              </a:rPr>
-              <a:t> ROLLBACK</a:t>
-            </a:r>
-            <a:r>
-              <a:rPr lang="en-US" sz="2250" dirty="0" spc="0" kern="0">
-                <a:solidFill>
-                  <a:srgbClr val="9AA0B5"/>
-                </a:solidFill>
-                <a:latin typeface="Be Vietnam Pro" pitchFamily="34" charset="0"/>
-                <a:ea typeface="Be Vietnam Pro" pitchFamily="34" charset="-122"/>
-                <a:cs typeface="Be Vietnam Pro" pitchFamily="34" charset="-120"/>
-              </a:rPr>
-              <a:t> nhận</a:t>
-            </a:r>
-            <a:r>
-              <a:rPr lang="en-US" sz="2250" dirty="0" spc="-32" kern="0">
-                <a:solidFill>
-                  <a:srgbClr val="9AA0B5"/>
-                </a:solidFill>
-                <a:latin typeface="Be Vietnam Pro" pitchFamily="34" charset="0"/>
-                <a:ea typeface="Be Vietnam Pro" pitchFamily="34" charset="-122"/>
-                <a:cs typeface="Be Vietnam Pro" pitchFamily="34" charset="-120"/>
-              </a:rPr>
-              <a:t> ra</a:t>
-            </a:r>
-            <a:r>
-              <a:rPr lang="en-US" sz="2250" dirty="0" spc="1" kern="0">
-                <a:solidFill>
-                  <a:srgbClr val="9AA0B5"/>
-                </a:solidFill>
-                <a:latin typeface="Be Vietnam Pro" pitchFamily="34" charset="0"/>
-                <a:ea typeface="Be Vietnam Pro" pitchFamily="34" charset="-122"/>
-                <a:cs typeface="Be Vietnam Pro" pitchFamily="34" charset="-120"/>
-              </a:rPr>
-              <a:t> chỉ</a:t>
-            </a:r>
-            <a:r>
-              <a:rPr lang="en-US" sz="2250" dirty="0" spc="-1" kern="0">
-                <a:solidFill>
-                  <a:srgbClr val="9AA0B5"/>
-                </a:solidFill>
-                <a:latin typeface="Be Vietnam Pro" pitchFamily="34" charset="0"/>
-                <a:ea typeface="Be Vietnam Pro" pitchFamily="34" charset="-122"/>
-                <a:cs typeface="Be Vietnam Pro" pitchFamily="34" charset="-120"/>
-              </a:rPr>
-              <a:t> bằng</a:t>
-            </a:r>
-            <a:r>
-              <a:rPr lang="en-US" sz="2250" dirty="0" spc="2" kern="0">
-                <a:solidFill>
-                  <a:srgbClr val="9AA0B5"/>
-                </a:solidFill>
-                <a:latin typeface="Be Vietnam Pro" pitchFamily="34" charset="0"/>
-                <a:ea typeface="Be Vietnam Pro" pitchFamily="34" charset="-122"/>
-                <a:cs typeface="Be Vietnam Pro" pitchFamily="34" charset="-120"/>
-              </a:rPr>
-              <a:t> ngữ pháp.</a:t>
+              <a:t> cần ngữ pháp.</a:t>
             </a:r>
             <a:endParaRPr lang="en-US" sz="2250" dirty="0"/>
           </a:p>
@@ -9527,17 +9362,6 @@
               <a:t>Cùng</a:t>
             </a:r>
             <a:r>
-              <a:rPr lang="en-US" sz="2400" dirty="0" spc="-3" kern="0">
-                <a:solidFill>
-                  <a:srgbClr val="6B6A66"/>
-                </a:solidFill>
-                <a:latin typeface="Be Vietnam Pro" pitchFamily="34" charset="0"/>
-                <a:ea typeface="Be Vietnam Pro" pitchFamily="34" charset="-122"/>
-                <a:cs typeface="Be Vietnam Pro" pitchFamily="34" charset="-120"/>
-              </a:rPr>
-              <a:t> một</a:t>
-            </a:r>
-            <a:r>
               <a:rPr lang="en-US" sz="2400" dirty="0" spc="0" kern="0">
                 <a:solidFill>
                   <a:srgbClr val="6B6A66"/>
@@ -10272,7 +10096,18 @@
                 <a:ea typeface="Be Vietnam Pro" pitchFamily="34" charset="-122"/>
                 <a:cs typeface="Be Vietnam Pro" pitchFamily="34" charset="-120"/>
               </a:rPr>
-              <a:t>Qua chỉ mục</a:t>
+              <a:t>Qua chỉ mục gần</a:t>
+            </a:r>
+            <a:r>
+              <a:rPr lang="en-US" sz="2550" b="1" dirty="0" spc="-9" kern="0">
+                <a:solidFill>
+                  <a:srgbClr val="14161C"/>
+                </a:solidFill>
+                <a:latin typeface="Be Vietnam Pro" pitchFamily="34" charset="0"/>
+                <a:ea typeface="Be Vietnam Pro" pitchFamily="34" charset="-122"/>
+                <a:cs typeface="Be Vietnam Pro" pitchFamily="34" charset="-120"/>
+              </a:rPr>
+              <a:t> hết</a:t>
             </a:r>
             <a:r>
               <a:rPr lang="en-US" sz="2550" b="1" dirty="0" spc="-2" kern="0">
@@ -10283,29 +10118,29 @@
                 <a:ea typeface="Be Vietnam Pro" pitchFamily="34" charset="-122"/>
                 <a:cs typeface="Be Vietnam Pro" pitchFamily="34" charset="-120"/>
               </a:rPr>
-              <a:t> cho</a:t>
-            </a:r>
-            <a:r>
-              <a:rPr lang="en-US" sz="2550" b="1" dirty="0" spc="-1" kern="0">
-                <a:solidFill>
-                  <a:srgbClr val="14161C"/>
-                </a:solidFill>
-                <a:latin typeface="Be Vietnam Pro" pitchFamily="34" charset="0"/>
-                <a:ea typeface="Be Vietnam Pro" pitchFamily="34" charset="-122"/>
-                <a:cs typeface="Be Vietnam Pro" pitchFamily="34" charset="-120"/>
-              </a:rPr>
-              <a:t> gần</a:t>
-            </a:r>
-            <a:r>
-              <a:rPr lang="en-US" sz="2550" b="1" dirty="0" spc="-9" kern="0">
-                <a:solidFill>
-                  <a:srgbClr val="14161C"/>
-                </a:solidFill>
-                <a:latin typeface="Be Vietnam Pro" pitchFamily="34" charset="0"/>
-                <a:ea typeface="Be Vietnam Pro" pitchFamily="34" charset="-122"/>
-                <a:cs typeface="Be Vietnam Pro" pitchFamily="34" charset="-120"/>
-              </a:rPr>
-              <a:t> hết</a:t>
+              <a:t> bảng</a:t>
+            </a:r>
+            <a:r>
+              <a:rPr lang="en-US" sz="2550" b="1" dirty="0" spc="-6" kern="0">
+                <a:solidFill>
+                  <a:srgbClr val="14161C"/>
+                </a:solidFill>
+                <a:latin typeface="Be Vietnam Pro" pitchFamily="34" charset="0"/>
+                <a:ea typeface="Be Vietnam Pro" pitchFamily="34" charset="-122"/>
+                <a:cs typeface="Be Vietnam Pro" pitchFamily="34" charset="-120"/>
+              </a:rPr>
+              <a:t> còn</a:t>
+            </a:r>
+            <a:r>
+              <a:rPr lang="en-US" sz="2550" b="1" dirty="0" spc="-8" kern="0">
+                <a:solidFill>
+                  <a:srgbClr val="14161C"/>
+                </a:solidFill>
+                <a:latin typeface="Be Vietnam Pro" pitchFamily="34" charset="0"/>
+                <a:ea typeface="Be Vietnam Pro" pitchFamily="34" charset="-122"/>
+                <a:cs typeface="Be Vietnam Pro" pitchFamily="34" charset="-120"/>
+              </a:rPr>
+              <a:t> tốn</a:t>
             </a:r>
             <a:r>
               <a:rPr lang="en-US" sz="2550" b="1" dirty="0" spc="-2" kern="0">
@@ -10316,51 +10151,7 @@
                 <a:ea typeface="Be Vietnam Pro" pitchFamily="34" charset="-122"/>
                 <a:cs typeface="Be Vietnam Pro" pitchFamily="34" charset="-120"/>
               </a:rPr>
-              <a:t> bảng</a:t>
-            </a:r>
-            <a:r>
-              <a:rPr lang="en-US" sz="2550" b="1" dirty="0" spc="-6" kern="0">
-                <a:solidFill>
-                  <a:srgbClr val="14161C"/>
-                </a:solidFill>
-                <a:latin typeface="Be Vietnam Pro" pitchFamily="34" charset="0"/>
-                <a:ea typeface="Be Vietnam Pro" pitchFamily="34" charset="-122"/>
-                <a:cs typeface="Be Vietnam Pro" pitchFamily="34" charset="-120"/>
-              </a:rPr>
-              <a:t> còn</a:t>
-            </a:r>
-            <a:r>
-              <a:rPr lang="en-US" sz="2550" b="1" dirty="0" spc="-8" kern="0">
-                <a:solidFill>
-                  <a:srgbClr val="14161C"/>
-                </a:solidFill>
-                <a:latin typeface="Be Vietnam Pro" pitchFamily="34" charset="0"/>
-                <a:ea typeface="Be Vietnam Pro" pitchFamily="34" charset="-122"/>
-                <a:cs typeface="Be Vietnam Pro" pitchFamily="34" charset="-120"/>
-              </a:rPr>
-              <a:t> tốn</a:t>
-            </a:r>
-            <a:r>
-              <a:rPr lang="en-US" sz="2550" b="1" dirty="0" spc="-2" kern="0">
-                <a:solidFill>
-                  <a:srgbClr val="14161C"/>
-                </a:solidFill>
-                <a:latin typeface="Be Vietnam Pro" pitchFamily="34" charset="0"/>
-                <a:ea typeface="Be Vietnam Pro" pitchFamily="34" charset="-122"/>
-                <a:cs typeface="Be Vietnam Pro" pitchFamily="34" charset="-120"/>
-              </a:rPr>
-              <a:t> hơn</a:t>
-            </a:r>
-            <a:r>
-              <a:rPr lang="en-US" sz="2550" b="1" dirty="0" spc="-3" kern="0">
-                <a:solidFill>
-                  <a:srgbClr val="14161C"/>
-                </a:solidFill>
-                <a:latin typeface="Be Vietnam Pro" pitchFamily="34" charset="0"/>
-                <a:ea typeface="Be Vietnam Pro" pitchFamily="34" charset="-122"/>
-                <a:cs typeface="Be Vietnam Pro" pitchFamily="34" charset="-120"/>
-              </a:rPr>
-              <a:t> quét.</a:t>
+              <a:t> hơn quét.</a:t>
             </a:r>
             <a:endParaRPr lang="en-US" sz="2550" dirty="0"/>
           </a:p>
@@ -16121,7 +15912,7 @@
               <a:buNone/>
             </a:pPr>
             <a:r>
-              <a:rPr lang="en-US" sz="2100" dirty="0" spc="1" kern="0">
+              <a:rPr lang="en-US" sz="2100" dirty="0" spc="-9" kern="0">
                 <a:solidFill>
                   <a:srgbClr val="6B6A66"/>
                 </a:solidFill>
@@ -16129,10 +15920,10 @@
                 <a:ea typeface="Be Vietnam Pro" pitchFamily="34" charset="-122"/>
                 <a:cs typeface="Be Vietnam Pro" pitchFamily="34" charset="-120"/>
               </a:rPr>
-              <a:t>Muốn</a:t>
-            </a:r>
-            <a:r>
-              <a:rPr lang="en-US" sz="2100" dirty="0" spc="-9" kern="0">
+              <a:t>Thấy</a:t>
+            </a:r>
+            <a:r>
+              <a:rPr lang="en-US" sz="2100" dirty="0" spc="-15" kern="0">
                 <a:solidFill>
                   <a:srgbClr val="6B6A66"/>
                 </a:solidFill>
@@ -16140,10 +15931,10 @@
                 <a:ea typeface="Be Vietnam Pro" pitchFamily="34" charset="-122"/>
                 <a:cs typeface="Be Vietnam Pro" pitchFamily="34" charset="-120"/>
               </a:rPr>
-              <a:t> thấy</a:t>
-            </a:r>
-            <a:r>
-              <a:rPr lang="en-US" sz="2100" dirty="0" spc="-15" kern="0">
+              <a:t> shared</a:t>
+            </a:r>
+            <a:r>
+              <a:rPr lang="en-US" sz="2100" dirty="0" spc="-23" kern="0">
                 <a:solidFill>
                   <a:srgbClr val="6B6A66"/>
                 </a:solidFill>
@@ -16151,10 +15942,10 @@
                 <a:ea typeface="Be Vietnam Pro" pitchFamily="34" charset="-122"/>
                 <a:cs typeface="Be Vietnam Pro" pitchFamily="34" charset="-120"/>
               </a:rPr>
-              <a:t> shared</a:t>
-            </a:r>
-            <a:r>
-              <a:rPr lang="en-US" sz="2100" dirty="0" spc="-23" kern="0">
+              <a:t> read</a:t>
+            </a:r>
+            <a:r>
+              <a:rPr lang="en-US" sz="2100" dirty="0" spc="-2" kern="0">
                 <a:solidFill>
                   <a:srgbClr val="6B6A66"/>
                 </a:solidFill>
@@ -16162,7 +15953,40 @@
                 <a:ea typeface="Be Vietnam Pro" pitchFamily="34" charset="-122"/>
                 <a:cs typeface="Be Vietnam Pro" pitchFamily="34" charset="-120"/>
               </a:rPr>
-              <a:t> read</a:t>
+              <a:t> lần</a:t>
+            </a:r>
+            <a:r>
+              <a:rPr lang="en-US" sz="2100" dirty="0" spc="8" kern="0">
+                <a:solidFill>
+                  <a:srgbClr val="6B6A66"/>
+                </a:solidFill>
+                <a:latin typeface="Be Vietnam Pro" pitchFamily="34" charset="0"/>
+                <a:ea typeface="Be Vietnam Pro" pitchFamily="34" charset="-122"/>
+                <a:cs typeface="Be Vietnam Pro" pitchFamily="34" charset="-120"/>
+              </a:rPr>
+              <a:t> đầu:</a:t>
+            </a:r>
+            <a:r>
+              <a:rPr lang="en-US" sz="2100" dirty="0" spc="-1" kern="0">
+                <a:solidFill>
+                  <a:srgbClr val="6B6A66"/>
+                </a:solidFill>
+                <a:latin typeface="Be Vietnam Pro" pitchFamily="34" charset="0"/>
+                <a:ea typeface="Be Vietnam Pro" pitchFamily="34" charset="-122"/>
+                <a:cs typeface="Be Vietnam Pro" pitchFamily="34" charset="-120"/>
+              </a:rPr>
+              <a:t> khởi</a:t>
+            </a:r>
+            <a:r>
+              <a:rPr lang="en-US" sz="2100" dirty="0" spc="8" kern="0">
+                <a:solidFill>
+                  <a:srgbClr val="6B6A66"/>
+                </a:solidFill>
+                <a:latin typeface="Be Vietnam Pro" pitchFamily="34" charset="0"/>
+                <a:ea typeface="Be Vietnam Pro" pitchFamily="34" charset="-122"/>
+                <a:cs typeface="Be Vietnam Pro" pitchFamily="34" charset="-120"/>
+              </a:rPr>
+              <a:t> động</a:t>
             </a:r>
             <a:r>
               <a:rPr lang="en-US" sz="2100" dirty="0" spc="-2" kern="0">
@@ -16173,10 +15997,10 @@
                 <a:ea typeface="Be Vietnam Pro" pitchFamily="34" charset="-122"/>
                 <a:cs typeface="Be Vietnam Pro" pitchFamily="34" charset="-120"/>
               </a:rPr>
-              <a:t> lần</a:t>
-            </a:r>
-            <a:r>
-              <a:rPr lang="en-US" sz="2100" dirty="0" spc="8" kern="0">
+              <a:t> lại</a:t>
+            </a:r>
+            <a:r>
+              <a:rPr lang="en-US" sz="2100" dirty="0" spc="-10" kern="0">
                 <a:solidFill>
                   <a:srgbClr val="6B6A66"/>
                 </a:solidFill>
@@ -16184,10 +16008,10 @@
                 <a:ea typeface="Be Vietnam Pro" pitchFamily="34" charset="-122"/>
                 <a:cs typeface="Be Vietnam Pro" pitchFamily="34" charset="-120"/>
               </a:rPr>
-              <a:t> đầu:</a:t>
-            </a:r>
-            <a:r>
-              <a:rPr lang="en-US" sz="2100" dirty="0" spc="-1" kern="0">
+              <a:t> máy</a:t>
+            </a:r>
+            <a:r>
+              <a:rPr lang="en-US" sz="2100" dirty="0" spc="0" kern="0">
                 <a:solidFill>
                   <a:srgbClr val="6B6A66"/>
                 </a:solidFill>
@@ -16195,62 +16019,7 @@
                 <a:ea typeface="Be Vietnam Pro" pitchFamily="34" charset="-122"/>
                 <a:cs typeface="Be Vietnam Pro" pitchFamily="34" charset="-120"/>
               </a:rPr>
-              <a:t> khởi</a:t>
-            </a:r>
-            <a:r>
-              <a:rPr lang="en-US" sz="2100" dirty="0" spc="7" kern="0">
-                <a:solidFill>
-                  <a:srgbClr val="6B6A66"/>
-                </a:solidFill>
-                <a:latin typeface="Be Vietnam Pro" pitchFamily="34" charset="0"/>
-                <a:ea typeface="Be Vietnam Pro" pitchFamily="34" charset="-122"/>
-                <a:cs typeface="Be Vietnam Pro" pitchFamily="34" charset="-120"/>
-              </a:rPr>
-              <a:t> động</a:t>
-            </a:r>
-            <a:r>
-              <a:rPr lang="en-US" sz="2100" dirty="0" spc="-1" kern="0">
-                <a:solidFill>
-                  <a:srgbClr val="6B6A66"/>
-                </a:solidFill>
-                <a:latin typeface="Be Vietnam Pro" pitchFamily="34" charset="0"/>
-                <a:ea typeface="Be Vietnam Pro" pitchFamily="34" charset="-122"/>
-                <a:cs typeface="Be Vietnam Pro" pitchFamily="34" charset="-120"/>
-              </a:rPr>
-              <a:t> lại</a:t>
-            </a:r>
-            <a:r>
-              <a:rPr lang="en-US" sz="2100" dirty="0" spc="-10" kern="0">
-                <a:solidFill>
-                  <a:srgbClr val="6B6A66"/>
-                </a:solidFill>
-                <a:latin typeface="Be Vietnam Pro" pitchFamily="34" charset="0"/>
-                <a:ea typeface="Be Vietnam Pro" pitchFamily="34" charset="-122"/>
-                <a:cs typeface="Be Vietnam Pro" pitchFamily="34" charset="-120"/>
-              </a:rPr>
-              <a:t> máy</a:t>
-            </a:r>
-            <a:r>
-              <a:rPr lang="en-US" sz="2100" dirty="0" spc="0" kern="0">
-                <a:solidFill>
-                  <a:srgbClr val="6B6A66"/>
-                </a:solidFill>
-                <a:latin typeface="Be Vietnam Pro" pitchFamily="34" charset="0"/>
-                <a:ea typeface="Be Vietnam Pro" pitchFamily="34" charset="-122"/>
-                <a:cs typeface="Be Vietnam Pro" pitchFamily="34" charset="-120"/>
-              </a:rPr>
-              <a:t> chủ</a:t>
-            </a:r>
-            <a:r>
-              <a:rPr lang="en-US" sz="2100" dirty="0" spc="2" kern="0">
-                <a:solidFill>
-                  <a:srgbClr val="6B6A66"/>
-                </a:solidFill>
-                <a:latin typeface="Be Vietnam Pro" pitchFamily="34" charset="0"/>
-                <a:ea typeface="Be Vietnam Pro" pitchFamily="34" charset="-122"/>
-                <a:cs typeface="Be Vietnam Pro" pitchFamily="34" charset="-120"/>
-              </a:rPr>
-              <a:t> trước.</a:t>
+              <a:t> chủ.</a:t>
             </a:r>
             <a:endParaRPr lang="en-US" sz="2100" dirty="0"/>
           </a:p>

--- a/system-design-101/vi/lessons/sd-04-027/slides/sd-04-027.pptx
+++ b/system-design-101/vi/lessons/sd-04-027/slides/sd-04-027.pptx
@@ -1799,17 +1799,17 @@
           <a:ln/>
         </p:spPr>
         <p:txBody>
-          <a:bodyPr wrap="square" lIns="0" tIns="64072" rIns="0" bIns="-64072" rtlCol="0" anchor="t"/>
+          <a:bodyPr wrap="square" lIns="0" tIns="69437" rIns="0" bIns="-69437" rtlCol="0" anchor="t"/>
           <a:lstStyle/>
           <a:p>
             <a:pPr algn="l" indent="0" marL="0">
               <a:lnSpc>
-                <a:spcPts val="7849"/>
+                <a:spcPts val="8505"/>
               </a:lnSpc>
               <a:buNone/>
             </a:pPr>
             <a:r>
-              <a:rPr lang="en-US" sz="7475" dirty="0" spc="-16" kern="0">
+              <a:rPr lang="en-US" sz="8100" dirty="0" spc="-14" kern="0">
                 <a:solidFill>
                   <a:srgbClr val="F3EEE3"/>
                 </a:solidFill>
@@ -1820,7 +1820,7 @@
               <a:t>Một</a:t>
             </a:r>
             <a:r>
-              <a:rPr lang="en-US" sz="7475" dirty="0" spc="1" kern="0">
+              <a:rPr lang="en-US" sz="8100" dirty="0" spc="-1" kern="0">
                 <a:solidFill>
                   <a:srgbClr val="F3EEE3"/>
                 </a:solidFill>
@@ -1831,7 +1831,7 @@
               <a:t> câu</a:t>
             </a:r>
             <a:r>
-              <a:rPr lang="en-US" sz="7475" dirty="0" spc="-2" kern="0">
+              <a:rPr lang="en-US" sz="8100" dirty="0" spc="-5" kern="0">
                 <a:solidFill>
                   <a:srgbClr val="F3EEE3"/>
                 </a:solidFill>
@@ -1842,7 +1842,7 @@
               <a:t> SQL</a:t>
             </a:r>
             <a:r>
-              <a:rPr lang="en-US" sz="7475" dirty="0" spc="40" kern="0">
+              <a:rPr lang="en-US" sz="8100" dirty="0" spc="40" kern="0">
                 <a:solidFill>
                   <a:srgbClr val="F3EEE3"/>
                 </a:solidFill>
@@ -1853,7 +1853,7 @@
               <a:t> đi</a:t>
             </a:r>
             <a:r>
-              <a:rPr lang="en-US" sz="7475" dirty="0" spc="1" kern="0">
+              <a:rPr lang="en-US" sz="8100" dirty="0" spc="-2" kern="0">
                 <a:solidFill>
                   <a:srgbClr val="F3EEE3"/>
                 </a:solidFill>
@@ -1864,7 +1864,7 @@
               <a:t> qua</a:t>
             </a:r>
             <a:r>
-              <a:rPr lang="en-US" sz="7475" dirty="0" spc="9" kern="0">
+              <a:rPr lang="en-US" sz="8100" dirty="0" spc="8" kern="0">
                 <a:solidFill>
                   <a:srgbClr val="F3EEE3"/>
                 </a:solidFill>
@@ -1875,7 +1875,7 @@
               <a:t> những</a:t>
             </a:r>
             <a:r>
-              <a:rPr lang="en-US" sz="7475" dirty="0" spc="3" kern="0">
+              <a:rPr lang="en-US" sz="8100" dirty="0" spc="0" kern="0">
                 <a:solidFill>
                   <a:srgbClr val="F3EEE3"/>
                 </a:solidFill>
@@ -1886,7 +1886,7 @@
               <a:t> chặng</a:t>
             </a:r>
             <a:r>
-              <a:rPr lang="en-US" sz="7475" dirty="0" spc="-42" kern="0">
+              <a:rPr lang="en-US" sz="8100" dirty="0" spc="-46" kern="0">
                 <a:solidFill>
                   <a:srgbClr val="F3EEE3"/>
                 </a:solidFill>
@@ -1896,7 +1896,7 @@
               </a:rPr>
               <a:t> nào?</a:t>
             </a:r>
-            <a:endParaRPr lang="en-US" sz="7475" dirty="0"/>
+            <a:endParaRPr lang="en-US" sz="8100" dirty="0"/>
           </a:p>
         </p:txBody>
       </p:sp>
@@ -13494,7 +13494,7 @@
               <a:buNone/>
             </a:pPr>
             <a:r>
-              <a:rPr lang="en-US" sz="6600" dirty="0" spc="-2" kern="0">
+              <a:rPr lang="en-US" sz="6900" dirty="0" spc="-4" kern="0">
                 <a:solidFill>
                   <a:srgbClr val="14161C"/>
                 </a:solidFill>
@@ -13505,7 +13505,7 @@
               <a:t>Ba</a:t>
             </a:r>
             <a:r>
-              <a:rPr lang="en-US" sz="6600" dirty="0" spc="-1" kern="0">
+              <a:rPr lang="en-US" sz="6900" dirty="0" spc="-1" kern="0">
                 <a:solidFill>
                   <a:srgbClr val="14161C"/>
                 </a:solidFill>
@@ -13516,7 +13516,7 @@
               <a:t> câu</a:t>
             </a:r>
             <a:r>
-              <a:rPr lang="en-US" sz="6600" dirty="0" spc="-2" kern="0">
+              <a:rPr lang="en-US" sz="6900" dirty="0" spc="-4" kern="0">
                 <a:solidFill>
                   <a:srgbClr val="14161C"/>
                 </a:solidFill>
@@ -13527,7 +13527,7 @@
               <a:t> báo</a:t>
             </a:r>
             <a:r>
-              <a:rPr lang="en-US" sz="6600" dirty="0" spc="-1" kern="0">
+              <a:rPr lang="en-US" sz="6900" dirty="0" spc="1" kern="0">
                 <a:solidFill>
                   <a:srgbClr val="14161C"/>
                 </a:solidFill>
@@ -13538,7 +13538,7 @@
               <a:t> lỗi:</a:t>
             </a:r>
             <a:r>
-              <a:rPr lang="en-US" sz="6600" dirty="0" spc="1" kern="0">
+              <a:rPr lang="en-US" sz="6900" dirty="0" spc="0" kern="0">
                 <a:solidFill>
                   <a:srgbClr val="14161C"/>
                 </a:solidFill>
@@ -13549,7 +13549,7 @@
               <a:t> mỗi</a:t>
             </a:r>
             <a:r>
-              <a:rPr lang="en-US" sz="6600" dirty="0" spc="-2" kern="0">
+              <a:rPr lang="en-US" sz="6900" dirty="0" spc="-1" kern="0">
                 <a:solidFill>
                   <a:srgbClr val="14161C"/>
                 </a:solidFill>
@@ -13560,7 +13560,7 @@
               <a:t> câu</a:t>
             </a:r>
             <a:r>
-              <a:rPr lang="en-US" sz="6600" dirty="0" spc="8" kern="0">
+              <a:rPr lang="en-US" sz="6900" dirty="0" spc="8" kern="0">
                 <a:solidFill>
                   <a:srgbClr val="14161C"/>
                 </a:solidFill>
@@ -13571,7 +13571,7 @@
               <a:t> dừng</a:t>
             </a:r>
             <a:r>
-              <a:rPr lang="en-US" sz="6600" dirty="0" spc="2" kern="0">
+              <a:rPr lang="en-US" sz="6900" dirty="0" spc="0" kern="0">
                 <a:solidFill>
                   <a:srgbClr val="14161C"/>
                 </a:solidFill>
@@ -13582,7 +13582,7 @@
               <a:t> ở</a:t>
             </a:r>
             <a:r>
-              <a:rPr lang="en-US" sz="6600" dirty="0" spc="5" kern="0">
+              <a:rPr lang="en-US" sz="6900" dirty="0" spc="4" kern="0">
                 <a:solidFill>
                   <a:srgbClr val="14161C"/>
                 </a:solidFill>
@@ -13592,7 +13592,7 @@
               </a:rPr>
               <a:t> đâu?</a:t>
             </a:r>
-            <a:endParaRPr lang="en-US" sz="6600" dirty="0"/>
+            <a:endParaRPr lang="en-US" sz="6900" dirty="0"/>
           </a:p>
         </p:txBody>
       </p:sp>
@@ -15117,7 +15117,7 @@
               <a:buNone/>
             </a:pPr>
             <a:r>
-              <a:rPr lang="en-US" sz="6600" dirty="0" spc="0" kern="0">
+              <a:rPr lang="en-US" sz="6900" dirty="0" spc="2" kern="0">
                 <a:solidFill>
                   <a:srgbClr val="14161C"/>
                 </a:solidFill>
@@ -15125,10 +15125,10 @@
                 <a:ea typeface="Bricolage Grotesque ExtraBold" pitchFamily="34" charset="-122"/>
                 <a:cs typeface="Bricolage Grotesque ExtraBold" pitchFamily="34" charset="-120"/>
               </a:rPr>
-              <a:t>Câu</a:t>
-            </a:r>
-            <a:r>
-              <a:rPr lang="en-US" sz="6600" dirty="0" spc="2" kern="0">
+              <a:t>Câu nào</a:t>
+            </a:r>
+            <a:r>
+              <a:rPr lang="en-US" sz="6900" dirty="0" spc="1" kern="0">
                 <a:solidFill>
                   <a:srgbClr val="14161C"/>
                 </a:solidFill>
@@ -15136,10 +15136,10 @@
                 <a:ea typeface="Bricolage Grotesque ExtraBold" pitchFamily="34" charset="-122"/>
                 <a:cs typeface="Bricolage Grotesque ExtraBold" pitchFamily="34" charset="-120"/>
               </a:rPr>
-              <a:t> nào</a:t>
-            </a:r>
-            <a:r>
-              <a:rPr lang="en-US" sz="6600" dirty="0" spc="-2" kern="0">
+              <a:t> cũng</a:t>
+            </a:r>
+            <a:r>
+              <a:rPr lang="en-US" sz="6900" dirty="0" spc="-1" kern="0">
                 <a:solidFill>
                   <a:srgbClr val="14161C"/>
                 </a:solidFill>
@@ -15147,10 +15147,10 @@
                 <a:ea typeface="Bricolage Grotesque ExtraBold" pitchFamily="34" charset="-122"/>
                 <a:cs typeface="Bricolage Grotesque ExtraBold" pitchFamily="34" charset="-120"/>
               </a:rPr>
-              <a:t> cũng</a:t>
-            </a:r>
-            <a:r>
-              <a:rPr lang="en-US" sz="6600" dirty="0" spc="-1" kern="0">
+              <a:t> chạy</a:t>
+            </a:r>
+            <a:r>
+              <a:rPr lang="en-US" sz="6900" dirty="0" spc="-14" kern="0">
                 <a:solidFill>
                   <a:srgbClr val="14161C"/>
                 </a:solidFill>
@@ -15158,10 +15158,10 @@
                 <a:ea typeface="Bricolage Grotesque ExtraBold" pitchFamily="34" charset="-122"/>
                 <a:cs typeface="Bricolage Grotesque ExtraBold" pitchFamily="34" charset="-120"/>
               </a:rPr>
-              <a:t> chạy</a:t>
-            </a:r>
-            <a:r>
-              <a:rPr lang="en-US" sz="6600" dirty="0" spc="-12" kern="0">
+              <a:t> trong</a:t>
+            </a:r>
+            <a:r>
+              <a:rPr lang="en-US" sz="6900" dirty="0" spc="-10" kern="0">
                 <a:solidFill>
                   <a:srgbClr val="14161C"/>
                 </a:solidFill>
@@ -15169,10 +15169,10 @@
                 <a:ea typeface="Bricolage Grotesque ExtraBold" pitchFamily="34" charset="-122"/>
                 <a:cs typeface="Bricolage Grotesque ExtraBold" pitchFamily="34" charset="-120"/>
               </a:rPr>
-              <a:t> trong</a:t>
-            </a:r>
-            <a:r>
-              <a:rPr lang="en-US" sz="6600" dirty="0" spc="-7" kern="0">
+              <a:t> một</a:t>
+            </a:r>
+            <a:r>
+              <a:rPr lang="en-US" sz="6900" dirty="0" spc="0" kern="0">
                 <a:solidFill>
                   <a:srgbClr val="14161C"/>
                 </a:solidFill>
@@ -15180,31 +15180,9 @@
                 <a:ea typeface="Bricolage Grotesque ExtraBold" pitchFamily="34" charset="-122"/>
                 <a:cs typeface="Bricolage Grotesque ExtraBold" pitchFamily="34" charset="-120"/>
               </a:rPr>
-              <a:t> một</a:t>
-            </a:r>
-            <a:r>
-              <a:rPr lang="en-US" sz="6600" dirty="0" spc="-1" kern="0">
-                <a:solidFill>
-                  <a:srgbClr val="14161C"/>
-                </a:solidFill>
-                <a:latin typeface="Bricolage Grotesque ExtraBold" pitchFamily="34" charset="0"/>
-                <a:ea typeface="Bricolage Grotesque ExtraBold" pitchFamily="34" charset="-122"/>
-                <a:cs typeface="Bricolage Grotesque ExtraBold" pitchFamily="34" charset="-120"/>
-              </a:rPr>
-              <a:t> giao</a:t>
-            </a:r>
-            <a:r>
-              <a:rPr lang="en-US" sz="6600" dirty="0" spc="-2" kern="0">
-                <a:solidFill>
-                  <a:srgbClr val="14161C"/>
-                </a:solidFill>
-                <a:latin typeface="Bricolage Grotesque ExtraBold" pitchFamily="34" charset="0"/>
-                <a:ea typeface="Bricolage Grotesque ExtraBold" pitchFamily="34" charset="-122"/>
-                <a:cs typeface="Bricolage Grotesque ExtraBold" pitchFamily="34" charset="-120"/>
-              </a:rPr>
-              <a:t> dịch</a:t>
-            </a:r>
-            <a:endParaRPr lang="en-US" sz="6600" dirty="0"/>
+              <a:t> giao dịch</a:t>
+            </a:r>
+            <a:endParaRPr lang="en-US" sz="6900" dirty="0"/>
           </a:p>
         </p:txBody>
       </p:sp>

--- a/system-design-101/vi/lessons/sd-04-027/slides/sd-04-027.pptx
+++ b/system-design-101/vi/lessons/sd-04-027/slides/sd-04-027.pptx
@@ -5852,10 +5852,10 @@
                 <a:ea typeface="Be Vietnam Pro" pitchFamily="34" charset="-122"/>
                 <a:cs typeface="Be Vietnam Pro" pitchFamily="34" charset="-120"/>
               </a:rPr>
-              <a:t>CHẶNG 1</a:t>
-            </a:r>
-            <a:r>
-              <a:rPr lang="en-US" sz="1950" b="1" spc="175" kern="0" dirty="0">
+              <a:t>CHẶNG 1,</a:t>
+            </a:r>
+            <a:r>
+              <a:rPr lang="en-US" sz="1950" b="1" spc="222" kern="0" dirty="0">
                 <a:solidFill>
                   <a:srgbClr val="E8472B"/>
                 </a:solidFill>
@@ -5863,7 +5863,7 @@
                 <a:ea typeface="Be Vietnam Pro" pitchFamily="34" charset="-122"/>
                 <a:cs typeface="Be Vietnam Pro" pitchFamily="34" charset="-120"/>
               </a:rPr>
-              <a:t> VÀ</a:t>
+              <a:t> 2</a:t>
             </a:r>
             <a:r>
               <a:rPr lang="en-US" sz="1950" b="1" spc="221" kern="0" dirty="0">
@@ -5874,10 +5874,10 @@
                 <a:ea typeface="Be Vietnam Pro" pitchFamily="34" charset="-122"/>
                 <a:cs typeface="Be Vietnam Pro" pitchFamily="34" charset="-120"/>
               </a:rPr>
-              <a:t> 2</a:t>
-            </a:r>
-            <a:r>
-              <a:rPr lang="en-US" sz="1950" b="1" spc="222" kern="0" dirty="0">
+              <a:t> ·</a:t>
+            </a:r>
+            <a:r>
+              <a:rPr lang="en-US" sz="1950" b="1" spc="223" kern="0" dirty="0">
                 <a:solidFill>
                   <a:srgbClr val="E8472B"/>
                 </a:solidFill>
@@ -5885,10 +5885,10 @@
                 <a:ea typeface="Be Vietnam Pro" pitchFamily="34" charset="-122"/>
                 <a:cs typeface="Be Vietnam Pro" pitchFamily="34" charset="-120"/>
               </a:rPr>
-              <a:t> ·</a:t>
-            </a:r>
-            <a:r>
-              <a:rPr lang="en-US" sz="1950" b="1" spc="223" kern="0" dirty="0">
+              <a:t> KẾT</a:t>
+            </a:r>
+            <a:r>
+              <a:rPr lang="en-US" sz="1950" b="1" spc="225" kern="0" dirty="0">
                 <a:solidFill>
                   <a:srgbClr val="E8472B"/>
                 </a:solidFill>
@@ -5896,7 +5896,29 @@
                 <a:ea typeface="Be Vietnam Pro" pitchFamily="34" charset="-122"/>
                 <a:cs typeface="Be Vietnam Pro" pitchFamily="34" charset="-120"/>
               </a:rPr>
-              <a:t> KẾT</a:t>
+              <a:t> NỐI, PHÂN</a:t>
+            </a:r>
+            <a:r>
+              <a:rPr lang="en-US" sz="1950" b="1" spc="226" kern="0" dirty="0">
+                <a:solidFill>
+                  <a:srgbClr val="E8472B"/>
+                </a:solidFill>
+                <a:latin typeface="Be Vietnam Pro" pitchFamily="34" charset="0"/>
+                <a:ea typeface="Be Vietnam Pro" pitchFamily="34" charset="-122"/>
+                <a:cs typeface="Be Vietnam Pro" pitchFamily="34" charset="-120"/>
+              </a:rPr>
+              <a:t> TÍCH</a:t>
+            </a:r>
+            <a:r>
+              <a:rPr lang="en-US" sz="1950" b="1" spc="224" kern="0" dirty="0">
+                <a:solidFill>
+                  <a:srgbClr val="E8472B"/>
+                </a:solidFill>
+                <a:latin typeface="Be Vietnam Pro" pitchFamily="34" charset="0"/>
+                <a:ea typeface="Be Vietnam Pro" pitchFamily="34" charset="-122"/>
+                <a:cs typeface="Be Vietnam Pro" pitchFamily="34" charset="-120"/>
+              </a:rPr>
+              <a:t> CÚ</a:t>
             </a:r>
             <a:r>
               <a:rPr lang="en-US" sz="1950" b="1" spc="225" kern="0" dirty="0">
@@ -5907,7 +5929,7 @@
                 <a:ea typeface="Be Vietnam Pro" pitchFamily="34" charset="-122"/>
                 <a:cs typeface="Be Vietnam Pro" pitchFamily="34" charset="-120"/>
               </a:rPr>
-              <a:t> NỐI, PHÂN TÍCH CÚ PHÁP</a:t>
+              <a:t> PHÁP</a:t>
             </a:r>
             <a:endParaRPr lang="en-US" sz="1950" dirty="0"/>
           </a:p>
